--- a/figures/CDS_dimensions_POP8GEN.pptx
+++ b/figures/CDS_dimensions_POP8GEN.pptx
@@ -271,7 +271,7 @@
           <a:p>
             <a:fld id="{A95D77CB-895C-4716-9BF4-5671FF00D98B}" type="datetimeFigureOut">
               <a:rPr lang="en-US" smtClean="0"/>
-              <a:t>10/9/2026</a:t>
+              <a:t>10/16/2026</a:t>
             </a:fld>
             <a:endParaRPr lang="en-US"/>
           </a:p>
@@ -601,18 +601,6 @@
           <a:bodyPr/>
           <a:lstStyle/>
           <a:p>
-            <a:r>
-              <a:rPr lang="fr-FR" dirty="0"/>
-              <a:t>Réduire en largeur et </a:t>
-            </a:r>
-            <a:r>
-              <a:rPr lang="fr-FR" dirty="0" err="1"/>
-              <a:t>equivalence</a:t>
-            </a:r>
-            <a:r>
-              <a:rPr lang="fr-FR" dirty="0"/>
-              <a:t> largeur boites et inverser facteurs et items</a:t>
-            </a:r>
             <a:endParaRPr lang="en-US" dirty="0"/>
           </a:p>
         </p:txBody>
@@ -808,7 +796,7 @@
           <a:p>
             <a:fld id="{D8C1C97A-706B-4236-A8E5-3358056837E6}" type="datetimeFigureOut">
               <a:rPr lang="en-US" smtClean="0"/>
-              <a:t>10/9/2026</a:t>
+              <a:t>10/16/2026</a:t>
             </a:fld>
             <a:endParaRPr lang="en-US"/>
           </a:p>
@@ -1008,7 +996,7 @@
           <a:p>
             <a:fld id="{D8C1C97A-706B-4236-A8E5-3358056837E6}" type="datetimeFigureOut">
               <a:rPr lang="en-US" smtClean="0"/>
-              <a:t>10/9/2026</a:t>
+              <a:t>10/16/2026</a:t>
             </a:fld>
             <a:endParaRPr lang="en-US"/>
           </a:p>
@@ -1218,7 +1206,7 @@
           <a:p>
             <a:fld id="{D8C1C97A-706B-4236-A8E5-3358056837E6}" type="datetimeFigureOut">
               <a:rPr lang="en-US" smtClean="0"/>
-              <a:t>10/9/2026</a:t>
+              <a:t>10/16/2026</a:t>
             </a:fld>
             <a:endParaRPr lang="en-US"/>
           </a:p>
@@ -1418,7 +1406,7 @@
           <a:p>
             <a:fld id="{D8C1C97A-706B-4236-A8E5-3358056837E6}" type="datetimeFigureOut">
               <a:rPr lang="en-US" smtClean="0"/>
-              <a:t>10/9/2026</a:t>
+              <a:t>10/16/2026</a:t>
             </a:fld>
             <a:endParaRPr lang="en-US"/>
           </a:p>
@@ -1694,7 +1682,7 @@
           <a:p>
             <a:fld id="{D8C1C97A-706B-4236-A8E5-3358056837E6}" type="datetimeFigureOut">
               <a:rPr lang="en-US" smtClean="0"/>
-              <a:t>10/9/2026</a:t>
+              <a:t>10/16/2026</a:t>
             </a:fld>
             <a:endParaRPr lang="en-US"/>
           </a:p>
@@ -1962,7 +1950,7 @@
           <a:p>
             <a:fld id="{D8C1C97A-706B-4236-A8E5-3358056837E6}" type="datetimeFigureOut">
               <a:rPr lang="en-US" smtClean="0"/>
-              <a:t>10/9/2026</a:t>
+              <a:t>10/16/2026</a:t>
             </a:fld>
             <a:endParaRPr lang="en-US"/>
           </a:p>
@@ -2377,7 +2365,7 @@
           <a:p>
             <a:fld id="{D8C1C97A-706B-4236-A8E5-3358056837E6}" type="datetimeFigureOut">
               <a:rPr lang="en-US" smtClean="0"/>
-              <a:t>10/9/2026</a:t>
+              <a:t>10/16/2026</a:t>
             </a:fld>
             <a:endParaRPr lang="en-US"/>
           </a:p>
@@ -2519,7 +2507,7 @@
           <a:p>
             <a:fld id="{D8C1C97A-706B-4236-A8E5-3358056837E6}" type="datetimeFigureOut">
               <a:rPr lang="en-US" smtClean="0"/>
-              <a:t>10/9/2026</a:t>
+              <a:t>10/16/2026</a:t>
             </a:fld>
             <a:endParaRPr lang="en-US"/>
           </a:p>
@@ -2632,7 +2620,7 @@
           <a:p>
             <a:fld id="{D8C1C97A-706B-4236-A8E5-3358056837E6}" type="datetimeFigureOut">
               <a:rPr lang="en-US" smtClean="0"/>
-              <a:t>10/9/2026</a:t>
+              <a:t>10/16/2026</a:t>
             </a:fld>
             <a:endParaRPr lang="en-US"/>
           </a:p>
@@ -2945,7 +2933,7 @@
           <a:p>
             <a:fld id="{D8C1C97A-706B-4236-A8E5-3358056837E6}" type="datetimeFigureOut">
               <a:rPr lang="en-US" smtClean="0"/>
-              <a:t>10/9/2026</a:t>
+              <a:t>10/16/2026</a:t>
             </a:fld>
             <a:endParaRPr lang="en-US"/>
           </a:p>
@@ -3234,7 +3222,7 @@
           <a:p>
             <a:fld id="{D8C1C97A-706B-4236-A8E5-3358056837E6}" type="datetimeFigureOut">
               <a:rPr lang="en-US" smtClean="0"/>
-              <a:t>10/9/2026</a:t>
+              <a:t>10/16/2026</a:t>
             </a:fld>
             <a:endParaRPr lang="en-US"/>
           </a:p>
@@ -3477,7 +3465,7 @@
           <a:p>
             <a:fld id="{D8C1C97A-706B-4236-A8E5-3358056837E6}" type="datetimeFigureOut">
               <a:rPr lang="en-US" smtClean="0"/>
-              <a:t>10/9/2026</a:t>
+              <a:t>10/16/2026</a:t>
             </a:fld>
             <a:endParaRPr lang="en-US"/>
           </a:p>
@@ -3914,7 +3902,7 @@
         </p:nvSpPr>
         <p:spPr>
           <a:xfrm>
-            <a:off x="7289622" y="920544"/>
+            <a:off x="7451547" y="1234869"/>
             <a:ext cx="1863851" cy="1704097"/>
           </a:xfrm>
           <a:prstGeom prst="ellipse">
@@ -3987,7 +3975,7 @@
         </p:nvSpPr>
         <p:spPr>
           <a:xfrm>
-            <a:off x="7172993" y="4537722"/>
+            <a:off x="7451546" y="4219843"/>
             <a:ext cx="1863851" cy="1704097"/>
           </a:xfrm>
           <a:prstGeom prst="ellipse">
@@ -4044,22 +4032,6 @@
               <a:t>Factor 2 :</a:t>
             </a:r>
           </a:p>
-          <a:p>
-            <a:pPr algn="ctr">
-              <a:spcAft>
-                <a:spcPts val="600"/>
-              </a:spcAft>
-            </a:pPr>
-            <a:endParaRPr lang="fr-FR" sz="1400" b="1" dirty="0">
-              <a:solidFill>
-                <a:schemeClr val="accent5">
-                  <a:lumMod val="50000"/>
-                </a:schemeClr>
-              </a:solidFill>
-              <a:latin typeface="Arial" panose="020B0604020202020204" pitchFamily="34" charset="0"/>
-              <a:cs typeface="Arial" panose="020B0604020202020204" pitchFamily="34" charset="0"/>
-            </a:endParaRPr>
-          </a:p>
         </p:txBody>
       </p:sp>
       <p:sp>
@@ -4076,7 +4048,7 @@
         </p:nvSpPr>
         <p:spPr>
           <a:xfrm>
-            <a:off x="2466191" y="4407840"/>
+            <a:off x="2628115" y="4228091"/>
             <a:ext cx="4474540" cy="262952"/>
           </a:xfrm>
           <a:prstGeom prst="roundRect">
@@ -4147,7 +4119,7 @@
         </p:nvCxnSpPr>
         <p:spPr>
           <a:xfrm>
-            <a:off x="6940731" y="351558"/>
+            <a:off x="7102656" y="665883"/>
             <a:ext cx="348891" cy="1421035"/>
           </a:xfrm>
           <a:prstGeom prst="straightConnector1">
@@ -4192,7 +4164,7 @@
         </p:nvSpPr>
         <p:spPr>
           <a:xfrm>
-            <a:off x="7172992" y="221772"/>
+            <a:off x="7615376" y="924889"/>
             <a:ext cx="1536192" cy="261610"/>
           </a:xfrm>
           <a:prstGeom prst="rect">
@@ -4206,6 +4178,21 @@
           </a:bodyPr>
           <a:lstStyle/>
           <a:p>
+            <a:pPr algn="ctr"/>
+            <a:r>
+              <a:rPr lang="en-US" sz="1100" dirty="0">
+                <a:solidFill>
+                  <a:schemeClr val="accent5">
+                    <a:lumMod val="50000"/>
+                  </a:schemeClr>
+                </a:solidFill>
+                <a:effectLst/>
+                <a:latin typeface="Times New Roman" panose="02020603050405020304" pitchFamily="18" charset="0"/>
+                <a:ea typeface="Aptos" panose="020B0004020202020204" pitchFamily="34" charset="0"/>
+                <a:cs typeface="Times New Roman" panose="02020603050405020304" pitchFamily="18" charset="0"/>
+              </a:rPr>
+              <a:t>ɑ</a:t>
+            </a:r>
             <a:r>
               <a:rPr lang="en-US" sz="1100" dirty="0">
                 <a:solidFill>
@@ -4218,7 +4205,7 @@
                 <a:ea typeface="Aptos" panose="020B0004020202020204" pitchFamily="34" charset="0"/>
                 <a:cs typeface="Arial" panose="020B0604020202020204" pitchFamily="34" charset="0"/>
               </a:rPr>
-              <a:t>ɑ = 0.89</a:t>
+              <a:t> = 0.83</a:t>
             </a:r>
             <a:endParaRPr lang="en-US" sz="1100" dirty="0">
               <a:solidFill>
@@ -4246,7 +4233,7 @@
         </p:nvSpPr>
         <p:spPr>
           <a:xfrm>
-            <a:off x="7172992" y="4268842"/>
+            <a:off x="7615375" y="3922806"/>
             <a:ext cx="1536192" cy="261610"/>
           </a:xfrm>
           <a:prstGeom prst="rect">
@@ -4260,6 +4247,21 @@
           </a:bodyPr>
           <a:lstStyle/>
           <a:p>
+            <a:pPr algn="ctr"/>
+            <a:r>
+              <a:rPr lang="en-US" sz="1100" dirty="0">
+                <a:solidFill>
+                  <a:schemeClr val="accent5">
+                    <a:lumMod val="50000"/>
+                  </a:schemeClr>
+                </a:solidFill>
+                <a:effectLst/>
+                <a:latin typeface="Times New Roman" panose="02020603050405020304" pitchFamily="18" charset="0"/>
+                <a:ea typeface="Aptos" panose="020B0004020202020204" pitchFamily="34" charset="0"/>
+                <a:cs typeface="Times New Roman" panose="02020603050405020304" pitchFamily="18" charset="0"/>
+              </a:rPr>
+              <a:t>ɑ</a:t>
+            </a:r>
             <a:r>
               <a:rPr lang="en-US" sz="1100" dirty="0">
                 <a:solidFill>
@@ -4272,7 +4274,7 @@
                 <a:ea typeface="Aptos" panose="020B0004020202020204" pitchFamily="34" charset="0"/>
                 <a:cs typeface="Arial" panose="020B0604020202020204" pitchFamily="34" charset="0"/>
               </a:rPr>
-              <a:t>ɑ = 0.80</a:t>
+              <a:t> = 0.66</a:t>
             </a:r>
             <a:endParaRPr lang="en-US" sz="1100" dirty="0">
               <a:solidFill>
@@ -4300,7 +4302,7 @@
         </p:nvSpPr>
         <p:spPr>
           <a:xfrm>
-            <a:off x="2466191" y="225569"/>
+            <a:off x="2628116" y="539894"/>
             <a:ext cx="4474540" cy="251977"/>
           </a:xfrm>
           <a:prstGeom prst="roundRect">
@@ -4367,7 +4369,7 @@
         </p:nvSpPr>
         <p:spPr>
           <a:xfrm>
-            <a:off x="2466191" y="501642"/>
+            <a:off x="2628116" y="815967"/>
             <a:ext cx="4474541" cy="254900"/>
           </a:xfrm>
           <a:prstGeom prst="roundRect">
@@ -4434,7 +4436,7 @@
         </p:nvSpPr>
         <p:spPr>
           <a:xfrm>
-            <a:off x="2466191" y="778050"/>
+            <a:off x="2628116" y="1092375"/>
             <a:ext cx="4474541" cy="254900"/>
           </a:xfrm>
           <a:prstGeom prst="roundRect">
@@ -4501,7 +4503,7 @@
         </p:nvSpPr>
         <p:spPr>
           <a:xfrm>
-            <a:off x="2466191" y="1059389"/>
+            <a:off x="2628116" y="1373714"/>
             <a:ext cx="4474541" cy="254900"/>
           </a:xfrm>
           <a:prstGeom prst="roundRect">
@@ -4568,7 +4570,7 @@
         </p:nvSpPr>
         <p:spPr>
           <a:xfrm>
-            <a:off x="2459339" y="1634094"/>
+            <a:off x="2621264" y="1948419"/>
             <a:ext cx="4474541" cy="276999"/>
           </a:xfrm>
           <a:prstGeom prst="roundRect">
@@ -4635,7 +4637,7 @@
         </p:nvSpPr>
         <p:spPr>
           <a:xfrm>
-            <a:off x="2459339" y="1933964"/>
+            <a:off x="2621264" y="2248289"/>
             <a:ext cx="4474541" cy="254900"/>
           </a:xfrm>
           <a:prstGeom prst="roundRect">
@@ -4702,7 +4704,7 @@
         </p:nvSpPr>
         <p:spPr>
           <a:xfrm>
-            <a:off x="2463450" y="2490397"/>
+            <a:off x="2625375" y="2804722"/>
             <a:ext cx="4474541" cy="254900"/>
           </a:xfrm>
           <a:prstGeom prst="roundRect">
@@ -4769,7 +4771,7 @@
         </p:nvSpPr>
         <p:spPr>
           <a:xfrm>
-            <a:off x="2463450" y="2777293"/>
+            <a:off x="2625375" y="3091618"/>
             <a:ext cx="4474541" cy="260812"/>
           </a:xfrm>
           <a:prstGeom prst="roundRect">
@@ -4836,7 +4838,7 @@
         </p:nvSpPr>
         <p:spPr>
           <a:xfrm>
-            <a:off x="2459339" y="4998162"/>
+            <a:off x="2621263" y="4818413"/>
             <a:ext cx="4474540" cy="254900"/>
           </a:xfrm>
           <a:prstGeom prst="roundRect">
@@ -4903,7 +4905,7 @@
         </p:nvSpPr>
         <p:spPr>
           <a:xfrm>
-            <a:off x="2460711" y="3056850"/>
+            <a:off x="2622636" y="3371175"/>
             <a:ext cx="4474540" cy="260812"/>
           </a:xfrm>
           <a:prstGeom prst="roundRect">
@@ -4970,7 +4972,7 @@
         </p:nvSpPr>
         <p:spPr>
           <a:xfrm>
-            <a:off x="2473043" y="5882512"/>
+            <a:off x="2634967" y="5702763"/>
             <a:ext cx="4474540" cy="261355"/>
           </a:xfrm>
           <a:prstGeom prst="roundRect">
@@ -5041,7 +5043,7 @@
         </p:nvCxnSpPr>
         <p:spPr>
           <a:xfrm>
-            <a:off x="6940732" y="629092"/>
+            <a:off x="7102657" y="943417"/>
             <a:ext cx="348890" cy="1143501"/>
           </a:xfrm>
           <a:prstGeom prst="straightConnector1">
@@ -5090,7 +5092,7 @@
         </p:nvCxnSpPr>
         <p:spPr>
           <a:xfrm>
-            <a:off x="6940732" y="905500"/>
+            <a:off x="7102657" y="1219825"/>
             <a:ext cx="348890" cy="867093"/>
           </a:xfrm>
           <a:prstGeom prst="straightConnector1">
@@ -5139,7 +5141,7 @@
         </p:nvCxnSpPr>
         <p:spPr>
           <a:xfrm>
-            <a:off x="6940732" y="1186839"/>
+            <a:off x="7102657" y="1501164"/>
             <a:ext cx="348890" cy="585754"/>
           </a:xfrm>
           <a:prstGeom prst="straightConnector1">
@@ -5188,7 +5190,7 @@
         </p:nvCxnSpPr>
         <p:spPr>
           <a:xfrm flipV="1">
-            <a:off x="6933880" y="1772593"/>
+            <a:off x="7095805" y="2086918"/>
             <a:ext cx="355742" cy="1"/>
           </a:xfrm>
           <a:prstGeom prst="straightConnector1">
@@ -5237,7 +5239,7 @@
         </p:nvCxnSpPr>
         <p:spPr>
           <a:xfrm flipV="1">
-            <a:off x="6933880" y="1772593"/>
+            <a:off x="7095805" y="2086918"/>
             <a:ext cx="355742" cy="288821"/>
           </a:xfrm>
           <a:prstGeom prst="straightConnector1">
@@ -5286,7 +5288,7 @@
         </p:nvCxnSpPr>
         <p:spPr>
           <a:xfrm flipV="1">
-            <a:off x="6937991" y="1772593"/>
+            <a:off x="7099916" y="2086918"/>
             <a:ext cx="351631" cy="845254"/>
           </a:xfrm>
           <a:prstGeom prst="straightConnector1">
@@ -5335,7 +5337,7 @@
         </p:nvCxnSpPr>
         <p:spPr>
           <a:xfrm flipV="1">
-            <a:off x="6937991" y="1772593"/>
+            <a:off x="7099916" y="2086918"/>
             <a:ext cx="351631" cy="1135106"/>
           </a:xfrm>
           <a:prstGeom prst="straightConnector1">
@@ -5384,8 +5386,8 @@
         </p:nvCxnSpPr>
         <p:spPr>
           <a:xfrm>
-            <a:off x="6940731" y="4539316"/>
-            <a:ext cx="232262" cy="850455"/>
+            <a:off x="7102655" y="4359567"/>
+            <a:ext cx="348891" cy="712325"/>
           </a:xfrm>
           <a:prstGeom prst="straightConnector1">
             <a:avLst/>
@@ -5433,8 +5435,8 @@
         </p:nvCxnSpPr>
         <p:spPr>
           <a:xfrm>
-            <a:off x="6940731" y="4830809"/>
-            <a:ext cx="232262" cy="558962"/>
+            <a:off x="7102655" y="4651060"/>
+            <a:ext cx="348891" cy="420832"/>
           </a:xfrm>
           <a:prstGeom prst="straightConnector1">
             <a:avLst/>
@@ -5482,8 +5484,8 @@
         </p:nvCxnSpPr>
         <p:spPr>
           <a:xfrm>
-            <a:off x="6933879" y="5125612"/>
-            <a:ext cx="239114" cy="264159"/>
+            <a:off x="7095803" y="4945863"/>
+            <a:ext cx="355743" cy="126029"/>
           </a:xfrm>
           <a:prstGeom prst="straightConnector1">
             <a:avLst/>
@@ -5525,13 +5527,14 @@
           <p:cNvCxnSpPr>
             <a:cxnSpLocks/>
             <a:stCxn id="111" idx="3"/>
+            <a:endCxn id="5" idx="2"/>
           </p:cNvCxnSpPr>
           <p:nvPr/>
         </p:nvCxnSpPr>
         <p:spPr>
-          <a:xfrm>
-            <a:off x="6940731" y="5415250"/>
-            <a:ext cx="239114" cy="104"/>
+          <a:xfrm flipV="1">
+            <a:off x="7102655" y="5071892"/>
+            <a:ext cx="348891" cy="163609"/>
           </a:xfrm>
           <a:prstGeom prst="straightConnector1">
             <a:avLst/>
@@ -5573,13 +5576,14 @@
           <p:cNvCxnSpPr>
             <a:cxnSpLocks/>
             <a:stCxn id="109" idx="3"/>
+            <a:endCxn id="5" idx="2"/>
           </p:cNvCxnSpPr>
           <p:nvPr/>
         </p:nvCxnSpPr>
         <p:spPr>
           <a:xfrm flipV="1">
-            <a:off x="6940731" y="5415354"/>
-            <a:ext cx="239114" cy="301062"/>
+            <a:off x="7102655" y="5071892"/>
+            <a:ext cx="348891" cy="464775"/>
           </a:xfrm>
           <a:prstGeom prst="straightConnector1">
             <a:avLst/>
@@ -5627,7 +5631,7 @@
         </p:nvCxnSpPr>
         <p:spPr>
           <a:xfrm flipV="1">
-            <a:off x="6935251" y="1772593"/>
+            <a:off x="7097176" y="2086918"/>
             <a:ext cx="354371" cy="1414663"/>
           </a:xfrm>
           <a:prstGeom prst="straightConnector1">
@@ -5670,13 +5674,14 @@
           <p:cNvCxnSpPr>
             <a:cxnSpLocks/>
             <a:stCxn id="43" idx="3"/>
+            <a:endCxn id="5" idx="2"/>
           </p:cNvCxnSpPr>
           <p:nvPr/>
         </p:nvCxnSpPr>
         <p:spPr>
           <a:xfrm flipV="1">
-            <a:off x="6947583" y="5415354"/>
-            <a:ext cx="232262" cy="597836"/>
+            <a:off x="7109507" y="5071892"/>
+            <a:ext cx="342039" cy="761549"/>
           </a:xfrm>
           <a:prstGeom prst="straightConnector1">
             <a:avLst/>
@@ -5708,103 +5713,19 @@
       </p:cxnSp>
       <p:sp>
         <p:nvSpPr>
-          <p:cNvPr id="2" name="ZoneTexte 1">
-            <a:extLst>
-              <a:ext uri="{FF2B5EF4-FFF2-40B4-BE49-F238E27FC236}">
-                <a16:creationId xmlns:a16="http://schemas.microsoft.com/office/drawing/2014/main" id="{FE1392B2-464F-C3BD-776E-6B4BF060C66B}"/>
-              </a:ext>
-            </a:extLst>
-          </p:cNvPr>
-          <p:cNvSpPr txBox="1"/>
+          <p:cNvPr id="14" name="Rectangle : coins arrondis 13">
+            <a:extLst>
+              <a:ext uri="{FF2B5EF4-FFF2-40B4-BE49-F238E27FC236}">
+                <a16:creationId xmlns:a16="http://schemas.microsoft.com/office/drawing/2014/main" id="{57A02254-EE55-B254-F399-6F251BE31477}"/>
+              </a:ext>
+            </a:extLst>
+          </p:cNvPr>
+          <p:cNvSpPr/>
           <p:nvPr/>
         </p:nvSpPr>
         <p:spPr>
           <a:xfrm>
-            <a:off x="2138857" y="0"/>
-            <a:ext cx="327334" cy="400110"/>
-          </a:xfrm>
-          <a:prstGeom prst="rect">
-            <a:avLst/>
-          </a:prstGeom>
-          <a:noFill/>
-        </p:spPr>
-        <p:txBody>
-          <a:bodyPr wrap="none" rtlCol="0">
-            <a:spAutoFit/>
-          </a:bodyPr>
-          <a:lstStyle/>
-          <a:p>
-            <a:r>
-              <a:rPr lang="fr-FR" sz="2000" b="1" dirty="0">
-                <a:latin typeface="Arial" panose="020B0604020202020204" pitchFamily="34" charset="0"/>
-                <a:cs typeface="Arial" panose="020B0604020202020204" pitchFamily="34" charset="0"/>
-              </a:rPr>
-              <a:t>a</a:t>
-            </a:r>
-            <a:endParaRPr lang="en-US" sz="2000" b="1" dirty="0">
-              <a:latin typeface="Arial" panose="020B0604020202020204" pitchFamily="34" charset="0"/>
-              <a:cs typeface="Arial" panose="020B0604020202020204" pitchFamily="34" charset="0"/>
-            </a:endParaRPr>
-          </a:p>
-        </p:txBody>
-      </p:sp>
-      <p:sp>
-        <p:nvSpPr>
-          <p:cNvPr id="7" name="ZoneTexte 6">
-            <a:extLst>
-              <a:ext uri="{FF2B5EF4-FFF2-40B4-BE49-F238E27FC236}">
-                <a16:creationId xmlns:a16="http://schemas.microsoft.com/office/drawing/2014/main" id="{1858A64C-9A70-894C-A802-AD5DDBA07513}"/>
-              </a:ext>
-            </a:extLst>
-          </p:cNvPr>
-          <p:cNvSpPr txBox="1"/>
-          <p:nvPr/>
-        </p:nvSpPr>
-        <p:spPr>
-          <a:xfrm>
-            <a:off x="9073960" y="10398"/>
-            <a:ext cx="341760" cy="400110"/>
-          </a:xfrm>
-          <a:prstGeom prst="rect">
-            <a:avLst/>
-          </a:prstGeom>
-          <a:noFill/>
-        </p:spPr>
-        <p:txBody>
-          <a:bodyPr wrap="none" rtlCol="0">
-            <a:spAutoFit/>
-          </a:bodyPr>
-          <a:lstStyle/>
-          <a:p>
-            <a:r>
-              <a:rPr lang="fr-FR" sz="2000" b="1" dirty="0">
-                <a:latin typeface="Arial" panose="020B0604020202020204" pitchFamily="34" charset="0"/>
-                <a:cs typeface="Arial" panose="020B0604020202020204" pitchFamily="34" charset="0"/>
-              </a:rPr>
-              <a:t>b</a:t>
-            </a:r>
-            <a:endParaRPr lang="en-US" sz="2000" b="1" dirty="0">
-              <a:latin typeface="Arial" panose="020B0604020202020204" pitchFamily="34" charset="0"/>
-              <a:cs typeface="Arial" panose="020B0604020202020204" pitchFamily="34" charset="0"/>
-            </a:endParaRPr>
-          </a:p>
-        </p:txBody>
-      </p:sp>
-      <p:sp>
-        <p:nvSpPr>
-          <p:cNvPr id="14" name="Rectangle : coins arrondis 13">
-            <a:extLst>
-              <a:ext uri="{FF2B5EF4-FFF2-40B4-BE49-F238E27FC236}">
-                <a16:creationId xmlns:a16="http://schemas.microsoft.com/office/drawing/2014/main" id="{57A02254-EE55-B254-F399-6F251BE31477}"/>
-              </a:ext>
-            </a:extLst>
-          </p:cNvPr>
-          <p:cNvSpPr/>
-          <p:nvPr/>
-        </p:nvSpPr>
-        <p:spPr>
-          <a:xfrm>
-            <a:off x="2466191" y="1335692"/>
+            <a:off x="2628116" y="1650017"/>
             <a:ext cx="4474541" cy="276999"/>
           </a:xfrm>
           <a:prstGeom prst="roundRect">
@@ -5875,7 +5796,7 @@
         </p:nvCxnSpPr>
         <p:spPr>
           <a:xfrm>
-            <a:off x="6940732" y="1474192"/>
+            <a:off x="7102657" y="1788517"/>
             <a:ext cx="348890" cy="298401"/>
           </a:xfrm>
           <a:prstGeom prst="straightConnector1">
@@ -5920,7 +5841,7 @@
         </p:nvSpPr>
         <p:spPr>
           <a:xfrm>
-            <a:off x="2460710" y="2214094"/>
+            <a:off x="2622635" y="2528419"/>
             <a:ext cx="4474541" cy="254900"/>
           </a:xfrm>
           <a:prstGeom prst="roundRect">
@@ -5991,7 +5912,7 @@
         </p:nvCxnSpPr>
         <p:spPr>
           <a:xfrm flipV="1">
-            <a:off x="6935251" y="1772593"/>
+            <a:off x="7097176" y="2086918"/>
             <a:ext cx="354371" cy="568951"/>
           </a:xfrm>
           <a:prstGeom prst="straightConnector1">
@@ -6036,7 +5957,7 @@
         </p:nvSpPr>
         <p:spPr>
           <a:xfrm>
-            <a:off x="2466191" y="4695629"/>
+            <a:off x="2628115" y="4515880"/>
             <a:ext cx="4474540" cy="270359"/>
           </a:xfrm>
           <a:prstGeom prst="roundRect">
@@ -6103,7 +6024,7 @@
         </p:nvSpPr>
         <p:spPr>
           <a:xfrm>
-            <a:off x="2466191" y="5586403"/>
+            <a:off x="2628115" y="5406654"/>
             <a:ext cx="4474540" cy="260025"/>
           </a:xfrm>
           <a:prstGeom prst="roundRect">
@@ -6170,7 +6091,7 @@
         </p:nvSpPr>
         <p:spPr>
           <a:xfrm>
-            <a:off x="2466191" y="5285237"/>
+            <a:off x="2628115" y="5105488"/>
             <a:ext cx="4474540" cy="260025"/>
           </a:xfrm>
           <a:prstGeom prst="roundRect">
